--- a/CSE281/Lecture 7.pptx
+++ b/CSE281/Lecture 7.pptx
@@ -10,6 +10,10 @@
     <p:sldId id="258" r:id="rId4"/>
     <p:sldId id="259" r:id="rId5"/>
     <p:sldId id="260" r:id="rId6"/>
+    <p:sldId id="261" r:id="rId7"/>
+    <p:sldId id="262" r:id="rId8"/>
+    <p:sldId id="263" r:id="rId9"/>
+    <p:sldId id="264" r:id="rId10"/>
   </p:sldIdLst>
   <p:sldSz cx="12192000" cy="6858000"/>
   <p:notesSz cx="6858000" cy="9144000"/>
@@ -286,7 +290,7 @@
           <a:p>
             <a:fld id="{48A87A34-81AB-432B-8DAE-1953F412C126}" type="datetimeFigureOut">
               <a:rPr lang="en-US" dirty="0"/>
-              <a:t>8/24/2025</a:t>
+              <a:t>11/19/2025</a:t>
             </a:fld>
             <a:endParaRPr lang="en-US" dirty="0"/>
           </a:p>
@@ -548,7 +552,7 @@
           <a:p>
             <a:fld id="{48A87A34-81AB-432B-8DAE-1953F412C126}" type="datetimeFigureOut">
               <a:rPr lang="en-US" dirty="0"/>
-              <a:t>8/24/2025</a:t>
+              <a:t>11/19/2025</a:t>
             </a:fld>
             <a:endParaRPr lang="en-US" dirty="0"/>
           </a:p>
@@ -775,7 +779,7 @@
             <a:fld id="{48A87A34-81AB-432B-8DAE-1953F412C126}" type="datetimeFigureOut">
               <a:rPr lang="en-US" dirty="0"/>
               <a:pPr/>
-              <a:t>8/24/2025</a:t>
+              <a:t>11/19/2025</a:t>
             </a:fld>
             <a:endParaRPr lang="en-US" dirty="0"/>
           </a:p>
@@ -1081,7 +1085,7 @@
             <a:fld id="{48A87A34-81AB-432B-8DAE-1953F412C126}" type="datetimeFigureOut">
               <a:rPr lang="en-US" dirty="0"/>
               <a:pPr/>
-              <a:t>8/24/2025</a:t>
+              <a:t>11/19/2025</a:t>
             </a:fld>
             <a:endParaRPr lang="en-US" dirty="0"/>
           </a:p>
@@ -1550,7 +1554,7 @@
             <a:fld id="{48A87A34-81AB-432B-8DAE-1953F412C126}" type="datetimeFigureOut">
               <a:rPr lang="en-US" dirty="0"/>
               <a:pPr/>
-              <a:t>8/24/2025</a:t>
+              <a:t>11/19/2025</a:t>
             </a:fld>
             <a:endParaRPr lang="en-US" dirty="0"/>
           </a:p>
@@ -2092,7 +2096,7 @@
           <a:p>
             <a:fld id="{48A87A34-81AB-432B-8DAE-1953F412C126}" type="datetimeFigureOut">
               <a:rPr lang="en-US" dirty="0"/>
-              <a:t>8/24/2025</a:t>
+              <a:t>11/19/2025</a:t>
             </a:fld>
             <a:endParaRPr lang="en-US" dirty="0"/>
           </a:p>
@@ -2861,7 +2865,7 @@
           <a:p>
             <a:fld id="{48A87A34-81AB-432B-8DAE-1953F412C126}" type="datetimeFigureOut">
               <a:rPr lang="en-US" dirty="0"/>
-              <a:t>8/24/2025</a:t>
+              <a:t>11/19/2025</a:t>
             </a:fld>
             <a:endParaRPr lang="en-US" dirty="0"/>
           </a:p>
@@ -3031,7 +3035,7 @@
           <a:p>
             <a:fld id="{48A87A34-81AB-432B-8DAE-1953F412C126}" type="datetimeFigureOut">
               <a:rPr lang="en-US" dirty="0"/>
-              <a:t>8/24/2025</a:t>
+              <a:t>11/19/2025</a:t>
             </a:fld>
             <a:endParaRPr lang="en-US" dirty="0"/>
           </a:p>
@@ -3250,7 +3254,7 @@
             <a:fld id="{48A87A34-81AB-432B-8DAE-1953F412C126}" type="datetimeFigureOut">
               <a:rPr lang="en-US" dirty="0"/>
               <a:pPr/>
-              <a:t>8/24/2025</a:t>
+              <a:t>11/19/2025</a:t>
             </a:fld>
             <a:endParaRPr lang="en-US" dirty="0"/>
           </a:p>
@@ -3425,7 +3429,7 @@
           <a:p>
             <a:fld id="{48A87A34-81AB-432B-8DAE-1953F412C126}" type="datetimeFigureOut">
               <a:rPr lang="en-US" dirty="0"/>
-              <a:t>8/24/2025</a:t>
+              <a:t>11/19/2025</a:t>
             </a:fld>
             <a:endParaRPr lang="en-US" dirty="0"/>
           </a:p>
@@ -3710,7 +3714,7 @@
             <a:fld id="{48A87A34-81AB-432B-8DAE-1953F412C126}" type="datetimeFigureOut">
               <a:rPr lang="en-US" dirty="0"/>
               <a:pPr/>
-              <a:t>8/24/2025</a:t>
+              <a:t>11/19/2025</a:t>
             </a:fld>
             <a:endParaRPr lang="en-US" dirty="0"/>
           </a:p>
@@ -3947,7 +3951,7 @@
           <a:p>
             <a:fld id="{48A87A34-81AB-432B-8DAE-1953F412C126}" type="datetimeFigureOut">
               <a:rPr lang="en-US" dirty="0"/>
-              <a:t>8/24/2025</a:t>
+              <a:t>11/19/2025</a:t>
             </a:fld>
             <a:endParaRPr lang="en-US" dirty="0"/>
           </a:p>
@@ -4321,7 +4325,7 @@
           <a:p>
             <a:fld id="{48A87A34-81AB-432B-8DAE-1953F412C126}" type="datetimeFigureOut">
               <a:rPr lang="en-US" dirty="0"/>
-              <a:t>8/24/2025</a:t>
+              <a:t>11/19/2025</a:t>
             </a:fld>
             <a:endParaRPr lang="en-US" dirty="0"/>
           </a:p>
@@ -4434,7 +4438,7 @@
           <a:p>
             <a:fld id="{48A87A34-81AB-432B-8DAE-1953F412C126}" type="datetimeFigureOut">
               <a:rPr lang="en-US" dirty="0"/>
-              <a:t>8/24/2025</a:t>
+              <a:t>11/19/2025</a:t>
             </a:fld>
             <a:endParaRPr lang="en-US" dirty="0"/>
           </a:p>
@@ -4524,7 +4528,7 @@
           <a:p>
             <a:fld id="{48A87A34-81AB-432B-8DAE-1953F412C126}" type="datetimeFigureOut">
               <a:rPr lang="en-US" dirty="0"/>
-              <a:t>8/24/2025</a:t>
+              <a:t>11/19/2025</a:t>
             </a:fld>
             <a:endParaRPr lang="en-US" dirty="0"/>
           </a:p>
@@ -4768,7 +4772,7 @@
           <a:p>
             <a:fld id="{48A87A34-81AB-432B-8DAE-1953F412C126}" type="datetimeFigureOut">
               <a:rPr lang="en-US" dirty="0"/>
-              <a:t>8/24/2025</a:t>
+              <a:t>11/19/2025</a:t>
             </a:fld>
             <a:endParaRPr lang="en-US" dirty="0"/>
           </a:p>
@@ -5020,7 +5024,7 @@
           <a:p>
             <a:fld id="{48A87A34-81AB-432B-8DAE-1953F412C126}" type="datetimeFigureOut">
               <a:rPr lang="en-US" dirty="0"/>
-              <a:t>8/24/2025</a:t>
+              <a:t>11/19/2025</a:t>
             </a:fld>
             <a:endParaRPr lang="en-US" dirty="0"/>
           </a:p>
@@ -5259,7 +5263,7 @@
             <a:fld id="{48A87A34-81AB-432B-8DAE-1953F412C126}" type="datetimeFigureOut">
               <a:rPr lang="en-US" dirty="0"/>
               <a:pPr/>
-              <a:t>8/24/2025</a:t>
+              <a:t>11/19/2025</a:t>
             </a:fld>
             <a:endParaRPr lang="en-US" dirty="0"/>
           </a:p>
@@ -6548,6 +6552,547 @@
 </p:sld>
 </file>
 
+<file path=ppt/slides/slide6.xml><?xml version="1.0" encoding="utf-8"?>
+<p:sld xmlns:a="http://schemas.openxmlformats.org/drawingml/2006/main" xmlns:r="http://schemas.openxmlformats.org/officeDocument/2006/relationships" xmlns:p="http://schemas.openxmlformats.org/presentationml/2006/main">
+  <p:cSld>
+    <p:spTree>
+      <p:nvGrpSpPr>
+        <p:cNvPr id="1" name="">
+          <a:extLst>
+            <a:ext uri="{FF2B5EF4-FFF2-40B4-BE49-F238E27FC236}">
+              <a16:creationId xmlns:a16="http://schemas.microsoft.com/office/drawing/2014/main" id="{24D42C49-9DAF-6F4F-6078-A6EE6B455F8C}"/>
+            </a:ext>
+          </a:extLst>
+        </p:cNvPr>
+        <p:cNvGrpSpPr/>
+        <p:nvPr/>
+      </p:nvGrpSpPr>
+      <p:grpSpPr>
+        <a:xfrm>
+          <a:off x="0" y="0"/>
+          <a:ext cx="0" cy="0"/>
+          <a:chOff x="0" y="0"/>
+          <a:chExt cx="0" cy="0"/>
+        </a:xfrm>
+      </p:grpSpPr>
+      <p:sp>
+        <p:nvSpPr>
+          <p:cNvPr id="3" name="Rectangle 2">
+            <a:extLst>
+              <a:ext uri="{FF2B5EF4-FFF2-40B4-BE49-F238E27FC236}">
+                <a16:creationId xmlns:a16="http://schemas.microsoft.com/office/drawing/2014/main" id="{7C4ECB75-6C03-90CE-20FC-486D14D74ED2}"/>
+              </a:ext>
+            </a:extLst>
+          </p:cNvPr>
+          <p:cNvSpPr/>
+          <p:nvPr/>
+        </p:nvSpPr>
+        <p:spPr>
+          <a:xfrm>
+            <a:off x="90702" y="1738544"/>
+            <a:ext cx="3835685" cy="2031325"/>
+          </a:xfrm>
+          <a:prstGeom prst="rect">
+            <a:avLst/>
+          </a:prstGeom>
+        </p:spPr>
+        <p:txBody>
+          <a:bodyPr wrap="square">
+            <a:spAutoFit/>
+          </a:bodyPr>
+          <a:lstStyle/>
+          <a:p>
+            <a:r>
+              <a:rPr lang="en-US" b="1" dirty="0"/>
+              <a:t>super vs this</a:t>
+            </a:r>
+          </a:p>
+          <a:p>
+            <a:r>
+              <a:rPr lang="en-US" dirty="0"/>
+              <a:t>super → refers to the immediate parent class object</a:t>
+            </a:r>
+          </a:p>
+          <a:p>
+            <a:r>
+              <a:rPr lang="en-US" dirty="0"/>
+              <a:t>this → refers to the current object</a:t>
+            </a:r>
+          </a:p>
+          <a:p>
+            <a:r>
+              <a:rPr lang="en-US" dirty="0"/>
+              <a:t>They can be used together when necessary.</a:t>
+            </a:r>
+          </a:p>
+        </p:txBody>
+      </p:sp>
+      <p:pic>
+        <p:nvPicPr>
+          <p:cNvPr id="5" name="Picture 4">
+            <a:extLst>
+              <a:ext uri="{FF2B5EF4-FFF2-40B4-BE49-F238E27FC236}">
+                <a16:creationId xmlns:a16="http://schemas.microsoft.com/office/drawing/2014/main" id="{6CDFFF1B-DF9B-FF1F-A877-ED7A7067B67F}"/>
+              </a:ext>
+            </a:extLst>
+          </p:cNvPr>
+          <p:cNvPicPr>
+            <a:picLocks noChangeAspect="1"/>
+          </p:cNvPicPr>
+          <p:nvPr/>
+        </p:nvPicPr>
+        <p:blipFill>
+          <a:blip r:embed="rId2"/>
+          <a:stretch>
+            <a:fillRect/>
+          </a:stretch>
+        </p:blipFill>
+        <p:spPr>
+          <a:xfrm>
+            <a:off x="4076700" y="123504"/>
+            <a:ext cx="8115300" cy="5781675"/>
+          </a:xfrm>
+          <a:prstGeom prst="rect">
+            <a:avLst/>
+          </a:prstGeom>
+        </p:spPr>
+      </p:pic>
+      <p:pic>
+        <p:nvPicPr>
+          <p:cNvPr id="7" name="Picture 6">
+            <a:extLst>
+              <a:ext uri="{FF2B5EF4-FFF2-40B4-BE49-F238E27FC236}">
+                <a16:creationId xmlns:a16="http://schemas.microsoft.com/office/drawing/2014/main" id="{D8023E3F-9372-9E9C-136B-83636FE6E8DC}"/>
+              </a:ext>
+            </a:extLst>
+          </p:cNvPr>
+          <p:cNvPicPr>
+            <a:picLocks noChangeAspect="1"/>
+          </p:cNvPicPr>
+          <p:nvPr/>
+        </p:nvPicPr>
+        <p:blipFill>
+          <a:blip r:embed="rId3"/>
+          <a:stretch>
+            <a:fillRect/>
+          </a:stretch>
+        </p:blipFill>
+        <p:spPr>
+          <a:xfrm>
+            <a:off x="193638" y="4565332"/>
+            <a:ext cx="3228975" cy="1019175"/>
+          </a:xfrm>
+          <a:prstGeom prst="rect">
+            <a:avLst/>
+          </a:prstGeom>
+        </p:spPr>
+      </p:pic>
+    </p:spTree>
+    <p:extLst>
+      <p:ext uri="{BB962C8B-B14F-4D97-AF65-F5344CB8AC3E}">
+        <p14:creationId xmlns:p14="http://schemas.microsoft.com/office/powerpoint/2010/main" val="2206305952"/>
+      </p:ext>
+    </p:extLst>
+  </p:cSld>
+  <p:clrMapOvr>
+    <a:masterClrMapping/>
+  </p:clrMapOvr>
+</p:sld>
+</file>
+
+<file path=ppt/slides/slide7.xml><?xml version="1.0" encoding="utf-8"?>
+<p:sld xmlns:a="http://schemas.openxmlformats.org/drawingml/2006/main" xmlns:r="http://schemas.openxmlformats.org/officeDocument/2006/relationships" xmlns:p="http://schemas.openxmlformats.org/presentationml/2006/main">
+  <p:cSld>
+    <p:spTree>
+      <p:nvGrpSpPr>
+        <p:cNvPr id="1" name="">
+          <a:extLst>
+            <a:ext uri="{FF2B5EF4-FFF2-40B4-BE49-F238E27FC236}">
+              <a16:creationId xmlns:a16="http://schemas.microsoft.com/office/drawing/2014/main" id="{52EAFD0F-8F86-31E0-7CC6-4BFE5B584C78}"/>
+            </a:ext>
+          </a:extLst>
+        </p:cNvPr>
+        <p:cNvGrpSpPr/>
+        <p:nvPr/>
+      </p:nvGrpSpPr>
+      <p:grpSpPr>
+        <a:xfrm>
+          <a:off x="0" y="0"/>
+          <a:ext cx="0" cy="0"/>
+          <a:chOff x="0" y="0"/>
+          <a:chExt cx="0" cy="0"/>
+        </a:xfrm>
+      </p:grpSpPr>
+      <p:sp>
+        <p:nvSpPr>
+          <p:cNvPr id="3" name="Rectangle 2">
+            <a:extLst>
+              <a:ext uri="{FF2B5EF4-FFF2-40B4-BE49-F238E27FC236}">
+                <a16:creationId xmlns:a16="http://schemas.microsoft.com/office/drawing/2014/main" id="{955AC3A5-ED32-614C-149B-05C2727AFAA3}"/>
+              </a:ext>
+            </a:extLst>
+          </p:cNvPr>
+          <p:cNvSpPr/>
+          <p:nvPr/>
+        </p:nvSpPr>
+        <p:spPr>
+          <a:xfrm>
+            <a:off x="90702" y="1738544"/>
+            <a:ext cx="3835685" cy="646331"/>
+          </a:xfrm>
+          <a:prstGeom prst="rect">
+            <a:avLst/>
+          </a:prstGeom>
+        </p:spPr>
+        <p:txBody>
+          <a:bodyPr wrap="square">
+            <a:spAutoFit/>
+          </a:bodyPr>
+          <a:lstStyle/>
+          <a:p>
+            <a:r>
+              <a:rPr lang="en-US" b="1" dirty="0"/>
+              <a:t>Calling Overloaded Parent Constructors</a:t>
+            </a:r>
+            <a:endParaRPr lang="en-US" dirty="0"/>
+          </a:p>
+        </p:txBody>
+      </p:sp>
+      <p:pic>
+        <p:nvPicPr>
+          <p:cNvPr id="4" name="Picture 3">
+            <a:extLst>
+              <a:ext uri="{FF2B5EF4-FFF2-40B4-BE49-F238E27FC236}">
+                <a16:creationId xmlns:a16="http://schemas.microsoft.com/office/drawing/2014/main" id="{074F1446-BACC-6854-FC31-46953563552C}"/>
+              </a:ext>
+            </a:extLst>
+          </p:cNvPr>
+          <p:cNvPicPr>
+            <a:picLocks noChangeAspect="1"/>
+          </p:cNvPicPr>
+          <p:nvPr/>
+        </p:nvPicPr>
+        <p:blipFill>
+          <a:blip r:embed="rId2"/>
+          <a:stretch>
+            <a:fillRect/>
+          </a:stretch>
+        </p:blipFill>
+        <p:spPr>
+          <a:xfrm>
+            <a:off x="4859964" y="0"/>
+            <a:ext cx="7463619" cy="6858000"/>
+          </a:xfrm>
+          <a:prstGeom prst="rect">
+            <a:avLst/>
+          </a:prstGeom>
+        </p:spPr>
+      </p:pic>
+      <p:pic>
+        <p:nvPicPr>
+          <p:cNvPr id="8" name="Picture 7">
+            <a:extLst>
+              <a:ext uri="{FF2B5EF4-FFF2-40B4-BE49-F238E27FC236}">
+                <a16:creationId xmlns:a16="http://schemas.microsoft.com/office/drawing/2014/main" id="{D7072D66-5FFC-2756-F9F6-1C2D76716007}"/>
+              </a:ext>
+            </a:extLst>
+          </p:cNvPr>
+          <p:cNvPicPr>
+            <a:picLocks noChangeAspect="1"/>
+          </p:cNvPicPr>
+          <p:nvPr/>
+        </p:nvPicPr>
+        <p:blipFill>
+          <a:blip r:embed="rId3"/>
+          <a:stretch>
+            <a:fillRect/>
+          </a:stretch>
+        </p:blipFill>
+        <p:spPr>
+          <a:xfrm>
+            <a:off x="716953" y="5180816"/>
+            <a:ext cx="2324100" cy="971550"/>
+          </a:xfrm>
+          <a:prstGeom prst="rect">
+            <a:avLst/>
+          </a:prstGeom>
+        </p:spPr>
+      </p:pic>
+    </p:spTree>
+    <p:extLst>
+      <p:ext uri="{BB962C8B-B14F-4D97-AF65-F5344CB8AC3E}">
+        <p14:creationId xmlns:p14="http://schemas.microsoft.com/office/powerpoint/2010/main" val="64377980"/>
+      </p:ext>
+    </p:extLst>
+  </p:cSld>
+  <p:clrMapOvr>
+    <a:masterClrMapping/>
+  </p:clrMapOvr>
+</p:sld>
+</file>
+
+<file path=ppt/slides/slide8.xml><?xml version="1.0" encoding="utf-8"?>
+<p:sld xmlns:a="http://schemas.openxmlformats.org/drawingml/2006/main" xmlns:r="http://schemas.openxmlformats.org/officeDocument/2006/relationships" xmlns:p="http://schemas.openxmlformats.org/presentationml/2006/main">
+  <p:cSld>
+    <p:spTree>
+      <p:nvGrpSpPr>
+        <p:cNvPr id="1" name="">
+          <a:extLst>
+            <a:ext uri="{FF2B5EF4-FFF2-40B4-BE49-F238E27FC236}">
+              <a16:creationId xmlns:a16="http://schemas.microsoft.com/office/drawing/2014/main" id="{A61F71DB-D447-FC3E-2ED5-F5B1101F583B}"/>
+            </a:ext>
+          </a:extLst>
+        </p:cNvPr>
+        <p:cNvGrpSpPr/>
+        <p:nvPr/>
+      </p:nvGrpSpPr>
+      <p:grpSpPr>
+        <a:xfrm>
+          <a:off x="0" y="0"/>
+          <a:ext cx="0" cy="0"/>
+          <a:chOff x="0" y="0"/>
+          <a:chExt cx="0" cy="0"/>
+        </a:xfrm>
+      </p:grpSpPr>
+      <p:sp>
+        <p:nvSpPr>
+          <p:cNvPr id="3" name="Rectangle 2">
+            <a:extLst>
+              <a:ext uri="{FF2B5EF4-FFF2-40B4-BE49-F238E27FC236}">
+                <a16:creationId xmlns:a16="http://schemas.microsoft.com/office/drawing/2014/main" id="{60A03966-8B46-DC28-3010-08BDEB20478D}"/>
+              </a:ext>
+            </a:extLst>
+          </p:cNvPr>
+          <p:cNvSpPr/>
+          <p:nvPr/>
+        </p:nvSpPr>
+        <p:spPr>
+          <a:xfrm>
+            <a:off x="90702" y="1738544"/>
+            <a:ext cx="3835685" cy="646331"/>
+          </a:xfrm>
+          <a:prstGeom prst="rect">
+            <a:avLst/>
+          </a:prstGeom>
+        </p:spPr>
+        <p:txBody>
+          <a:bodyPr wrap="square">
+            <a:spAutoFit/>
+          </a:bodyPr>
+          <a:lstStyle/>
+          <a:p>
+            <a:r>
+              <a:rPr lang="en-US" b="1"/>
+              <a:t>super() is inserted automatically (only for no-arg)</a:t>
+            </a:r>
+            <a:endParaRPr lang="en-US" dirty="0"/>
+          </a:p>
+        </p:txBody>
+      </p:sp>
+      <p:pic>
+        <p:nvPicPr>
+          <p:cNvPr id="10" name="Picture 9">
+            <a:extLst>
+              <a:ext uri="{FF2B5EF4-FFF2-40B4-BE49-F238E27FC236}">
+                <a16:creationId xmlns:a16="http://schemas.microsoft.com/office/drawing/2014/main" id="{CD50B38E-D7EF-18A6-0E63-0C092BE68AFD}"/>
+              </a:ext>
+            </a:extLst>
+          </p:cNvPr>
+          <p:cNvPicPr>
+            <a:picLocks noChangeAspect="1"/>
+          </p:cNvPicPr>
+          <p:nvPr/>
+        </p:nvPicPr>
+        <p:blipFill>
+          <a:blip r:embed="rId2"/>
+          <a:stretch>
+            <a:fillRect/>
+          </a:stretch>
+        </p:blipFill>
+        <p:spPr>
+          <a:xfrm>
+            <a:off x="4146052" y="0"/>
+            <a:ext cx="8239125" cy="5562600"/>
+          </a:xfrm>
+          <a:prstGeom prst="rect">
+            <a:avLst/>
+          </a:prstGeom>
+        </p:spPr>
+      </p:pic>
+      <p:pic>
+        <p:nvPicPr>
+          <p:cNvPr id="12" name="Picture 11">
+            <a:extLst>
+              <a:ext uri="{FF2B5EF4-FFF2-40B4-BE49-F238E27FC236}">
+                <a16:creationId xmlns:a16="http://schemas.microsoft.com/office/drawing/2014/main" id="{F365109C-0E95-A214-036F-1D2D30B2C06A}"/>
+              </a:ext>
+            </a:extLst>
+          </p:cNvPr>
+          <p:cNvPicPr>
+            <a:picLocks noChangeAspect="1"/>
+          </p:cNvPicPr>
+          <p:nvPr/>
+        </p:nvPicPr>
+        <p:blipFill>
+          <a:blip r:embed="rId3"/>
+          <a:stretch>
+            <a:fillRect/>
+          </a:stretch>
+        </p:blipFill>
+        <p:spPr>
+          <a:xfrm>
+            <a:off x="4146052" y="5562600"/>
+            <a:ext cx="4010025" cy="1000125"/>
+          </a:xfrm>
+          <a:prstGeom prst="rect">
+            <a:avLst/>
+          </a:prstGeom>
+        </p:spPr>
+      </p:pic>
+    </p:spTree>
+    <p:extLst>
+      <p:ext uri="{BB962C8B-B14F-4D97-AF65-F5344CB8AC3E}">
+        <p14:creationId xmlns:p14="http://schemas.microsoft.com/office/powerpoint/2010/main" val="804929803"/>
+      </p:ext>
+    </p:extLst>
+  </p:cSld>
+  <p:clrMapOvr>
+    <a:masterClrMapping/>
+  </p:clrMapOvr>
+</p:sld>
+</file>
+
+<file path=ppt/slides/slide9.xml><?xml version="1.0" encoding="utf-8"?>
+<p:sld xmlns:a="http://schemas.openxmlformats.org/drawingml/2006/main" xmlns:r="http://schemas.openxmlformats.org/officeDocument/2006/relationships" xmlns:p="http://schemas.openxmlformats.org/presentationml/2006/main">
+  <p:cSld>
+    <p:spTree>
+      <p:nvGrpSpPr>
+        <p:cNvPr id="1" name="">
+          <a:extLst>
+            <a:ext uri="{FF2B5EF4-FFF2-40B4-BE49-F238E27FC236}">
+              <a16:creationId xmlns:a16="http://schemas.microsoft.com/office/drawing/2014/main" id="{417FCE13-2723-0DB1-3D66-F58BBC2E0292}"/>
+            </a:ext>
+          </a:extLst>
+        </p:cNvPr>
+        <p:cNvGrpSpPr/>
+        <p:nvPr/>
+      </p:nvGrpSpPr>
+      <p:grpSpPr>
+        <a:xfrm>
+          <a:off x="0" y="0"/>
+          <a:ext cx="0" cy="0"/>
+          <a:chOff x="0" y="0"/>
+          <a:chExt cx="0" cy="0"/>
+        </a:xfrm>
+      </p:grpSpPr>
+      <p:sp>
+        <p:nvSpPr>
+          <p:cNvPr id="3" name="Rectangle 2">
+            <a:extLst>
+              <a:ext uri="{FF2B5EF4-FFF2-40B4-BE49-F238E27FC236}">
+                <a16:creationId xmlns:a16="http://schemas.microsoft.com/office/drawing/2014/main" id="{FB297654-1D26-D73B-873B-CA6E27FDE6B7}"/>
+              </a:ext>
+            </a:extLst>
+          </p:cNvPr>
+          <p:cNvSpPr/>
+          <p:nvPr/>
+        </p:nvSpPr>
+        <p:spPr>
+          <a:xfrm>
+            <a:off x="90702" y="1738544"/>
+            <a:ext cx="3835685" cy="646331"/>
+          </a:xfrm>
+          <a:prstGeom prst="rect">
+            <a:avLst/>
+          </a:prstGeom>
+        </p:spPr>
+        <p:txBody>
+          <a:bodyPr wrap="square">
+            <a:spAutoFit/>
+          </a:bodyPr>
+          <a:lstStyle/>
+          <a:p>
+            <a:r>
+              <a:rPr lang="en-US" b="1"/>
+              <a:t>super() is inserted automatically (only for no-arg)</a:t>
+            </a:r>
+            <a:endParaRPr lang="en-US" dirty="0"/>
+          </a:p>
+        </p:txBody>
+      </p:sp>
+      <p:pic>
+        <p:nvPicPr>
+          <p:cNvPr id="6" name="Picture 5">
+            <a:extLst>
+              <a:ext uri="{FF2B5EF4-FFF2-40B4-BE49-F238E27FC236}">
+                <a16:creationId xmlns:a16="http://schemas.microsoft.com/office/drawing/2014/main" id="{A7AA141F-9F57-2FA2-1824-BEF5E7A81832}"/>
+              </a:ext>
+            </a:extLst>
+          </p:cNvPr>
+          <p:cNvPicPr>
+            <a:picLocks noChangeAspect="1"/>
+          </p:cNvPicPr>
+          <p:nvPr/>
+        </p:nvPicPr>
+        <p:blipFill>
+          <a:blip r:embed="rId2"/>
+          <a:stretch>
+            <a:fillRect/>
+          </a:stretch>
+        </p:blipFill>
+        <p:spPr>
+          <a:xfrm>
+            <a:off x="4225545" y="0"/>
+            <a:ext cx="7966455" cy="6858000"/>
+          </a:xfrm>
+          <a:prstGeom prst="rect">
+            <a:avLst/>
+          </a:prstGeom>
+        </p:spPr>
+      </p:pic>
+      <p:pic>
+        <p:nvPicPr>
+          <p:cNvPr id="8" name="Picture 7">
+            <a:extLst>
+              <a:ext uri="{FF2B5EF4-FFF2-40B4-BE49-F238E27FC236}">
+                <a16:creationId xmlns:a16="http://schemas.microsoft.com/office/drawing/2014/main" id="{3B37170C-D4BD-9DFF-6BB3-35671F5CFA33}"/>
+              </a:ext>
+            </a:extLst>
+          </p:cNvPr>
+          <p:cNvPicPr>
+            <a:picLocks noChangeAspect="1"/>
+          </p:cNvPicPr>
+          <p:nvPr/>
+        </p:nvPicPr>
+        <p:blipFill>
+          <a:blip r:embed="rId3"/>
+          <a:stretch>
+            <a:fillRect/>
+          </a:stretch>
+        </p:blipFill>
+        <p:spPr>
+          <a:xfrm>
+            <a:off x="486615" y="4920334"/>
+            <a:ext cx="2505075" cy="1019175"/>
+          </a:xfrm>
+          <a:prstGeom prst="rect">
+            <a:avLst/>
+          </a:prstGeom>
+        </p:spPr>
+      </p:pic>
+    </p:spTree>
+    <p:extLst>
+      <p:ext uri="{BB962C8B-B14F-4D97-AF65-F5344CB8AC3E}">
+        <p14:creationId xmlns:p14="http://schemas.microsoft.com/office/powerpoint/2010/main" val="2494931549"/>
+      </p:ext>
+    </p:extLst>
+  </p:cSld>
+  <p:clrMapOvr>
+    <a:masterClrMapping/>
+  </p:clrMapOvr>
+</p:sld>
+</file>
+
 <file path=ppt/theme/theme1.xml><?xml version="1.0" encoding="utf-8"?>
 <a:theme xmlns:a="http://schemas.openxmlformats.org/drawingml/2006/main" name="Vapor Trail">
   <a:themeElements>

--- a/CSE281/Lecture 7.pptx
+++ b/CSE281/Lecture 7.pptx
@@ -12,8 +12,10 @@
     <p:sldId id="260" r:id="rId6"/>
     <p:sldId id="261" r:id="rId7"/>
     <p:sldId id="262" r:id="rId8"/>
-    <p:sldId id="263" r:id="rId9"/>
-    <p:sldId id="264" r:id="rId10"/>
+    <p:sldId id="266" r:id="rId9"/>
+    <p:sldId id="265" r:id="rId10"/>
+    <p:sldId id="263" r:id="rId11"/>
+    <p:sldId id="264" r:id="rId12"/>
   </p:sldIdLst>
   <p:sldSz cx="12192000" cy="6858000"/>
   <p:notesSz cx="6858000" cy="9144000"/>
@@ -5755,6 +5757,268 @@
 </p:sld>
 </file>
 
+<file path=ppt/slides/slide10.xml><?xml version="1.0" encoding="utf-8"?>
+<p:sld xmlns:a="http://schemas.openxmlformats.org/drawingml/2006/main" xmlns:r="http://schemas.openxmlformats.org/officeDocument/2006/relationships" xmlns:p="http://schemas.openxmlformats.org/presentationml/2006/main">
+  <p:cSld>
+    <p:spTree>
+      <p:nvGrpSpPr>
+        <p:cNvPr id="1" name="">
+          <a:extLst>
+            <a:ext uri="{FF2B5EF4-FFF2-40B4-BE49-F238E27FC236}">
+              <a16:creationId xmlns:a16="http://schemas.microsoft.com/office/drawing/2014/main" id="{A61F71DB-D447-FC3E-2ED5-F5B1101F583B}"/>
+            </a:ext>
+          </a:extLst>
+        </p:cNvPr>
+        <p:cNvGrpSpPr/>
+        <p:nvPr/>
+      </p:nvGrpSpPr>
+      <p:grpSpPr>
+        <a:xfrm>
+          <a:off x="0" y="0"/>
+          <a:ext cx="0" cy="0"/>
+          <a:chOff x="0" y="0"/>
+          <a:chExt cx="0" cy="0"/>
+        </a:xfrm>
+      </p:grpSpPr>
+      <p:sp>
+        <p:nvSpPr>
+          <p:cNvPr id="3" name="Rectangle 2">
+            <a:extLst>
+              <a:ext uri="{FF2B5EF4-FFF2-40B4-BE49-F238E27FC236}">
+                <a16:creationId xmlns:a16="http://schemas.microsoft.com/office/drawing/2014/main" id="{60A03966-8B46-DC28-3010-08BDEB20478D}"/>
+              </a:ext>
+            </a:extLst>
+          </p:cNvPr>
+          <p:cNvSpPr/>
+          <p:nvPr/>
+        </p:nvSpPr>
+        <p:spPr>
+          <a:xfrm>
+            <a:off x="90702" y="1738544"/>
+            <a:ext cx="3835685" cy="646331"/>
+          </a:xfrm>
+          <a:prstGeom prst="rect">
+            <a:avLst/>
+          </a:prstGeom>
+        </p:spPr>
+        <p:txBody>
+          <a:bodyPr wrap="square">
+            <a:spAutoFit/>
+          </a:bodyPr>
+          <a:lstStyle/>
+          <a:p>
+            <a:r>
+              <a:rPr lang="en-US" b="1"/>
+              <a:t>super() is inserted automatically (only for no-arg)</a:t>
+            </a:r>
+            <a:endParaRPr lang="en-US" dirty="0"/>
+          </a:p>
+        </p:txBody>
+      </p:sp>
+      <p:pic>
+        <p:nvPicPr>
+          <p:cNvPr id="10" name="Picture 9">
+            <a:extLst>
+              <a:ext uri="{FF2B5EF4-FFF2-40B4-BE49-F238E27FC236}">
+                <a16:creationId xmlns:a16="http://schemas.microsoft.com/office/drawing/2014/main" id="{CD50B38E-D7EF-18A6-0E63-0C092BE68AFD}"/>
+              </a:ext>
+            </a:extLst>
+          </p:cNvPr>
+          <p:cNvPicPr>
+            <a:picLocks noChangeAspect="1"/>
+          </p:cNvPicPr>
+          <p:nvPr/>
+        </p:nvPicPr>
+        <p:blipFill>
+          <a:blip r:embed="rId2"/>
+          <a:stretch>
+            <a:fillRect/>
+          </a:stretch>
+        </p:blipFill>
+        <p:spPr>
+          <a:xfrm>
+            <a:off x="4146052" y="0"/>
+            <a:ext cx="8239125" cy="5562600"/>
+          </a:xfrm>
+          <a:prstGeom prst="rect">
+            <a:avLst/>
+          </a:prstGeom>
+        </p:spPr>
+      </p:pic>
+      <p:pic>
+        <p:nvPicPr>
+          <p:cNvPr id="12" name="Picture 11">
+            <a:extLst>
+              <a:ext uri="{FF2B5EF4-FFF2-40B4-BE49-F238E27FC236}">
+                <a16:creationId xmlns:a16="http://schemas.microsoft.com/office/drawing/2014/main" id="{F365109C-0E95-A214-036F-1D2D30B2C06A}"/>
+              </a:ext>
+            </a:extLst>
+          </p:cNvPr>
+          <p:cNvPicPr>
+            <a:picLocks noChangeAspect="1"/>
+          </p:cNvPicPr>
+          <p:nvPr/>
+        </p:nvPicPr>
+        <p:blipFill>
+          <a:blip r:embed="rId3"/>
+          <a:stretch>
+            <a:fillRect/>
+          </a:stretch>
+        </p:blipFill>
+        <p:spPr>
+          <a:xfrm>
+            <a:off x="4146052" y="5562600"/>
+            <a:ext cx="4010025" cy="1000125"/>
+          </a:xfrm>
+          <a:prstGeom prst="rect">
+            <a:avLst/>
+          </a:prstGeom>
+        </p:spPr>
+      </p:pic>
+    </p:spTree>
+    <p:extLst>
+      <p:ext uri="{BB962C8B-B14F-4D97-AF65-F5344CB8AC3E}">
+        <p14:creationId xmlns:p14="http://schemas.microsoft.com/office/powerpoint/2010/main" val="804929803"/>
+      </p:ext>
+    </p:extLst>
+  </p:cSld>
+  <p:clrMapOvr>
+    <a:masterClrMapping/>
+  </p:clrMapOvr>
+</p:sld>
+</file>
+
+<file path=ppt/slides/slide11.xml><?xml version="1.0" encoding="utf-8"?>
+<p:sld xmlns:a="http://schemas.openxmlformats.org/drawingml/2006/main" xmlns:r="http://schemas.openxmlformats.org/officeDocument/2006/relationships" xmlns:p="http://schemas.openxmlformats.org/presentationml/2006/main">
+  <p:cSld>
+    <p:spTree>
+      <p:nvGrpSpPr>
+        <p:cNvPr id="1" name="">
+          <a:extLst>
+            <a:ext uri="{FF2B5EF4-FFF2-40B4-BE49-F238E27FC236}">
+              <a16:creationId xmlns:a16="http://schemas.microsoft.com/office/drawing/2014/main" id="{417FCE13-2723-0DB1-3D66-F58BBC2E0292}"/>
+            </a:ext>
+          </a:extLst>
+        </p:cNvPr>
+        <p:cNvGrpSpPr/>
+        <p:nvPr/>
+      </p:nvGrpSpPr>
+      <p:grpSpPr>
+        <a:xfrm>
+          <a:off x="0" y="0"/>
+          <a:ext cx="0" cy="0"/>
+          <a:chOff x="0" y="0"/>
+          <a:chExt cx="0" cy="0"/>
+        </a:xfrm>
+      </p:grpSpPr>
+      <p:sp>
+        <p:nvSpPr>
+          <p:cNvPr id="3" name="Rectangle 2">
+            <a:extLst>
+              <a:ext uri="{FF2B5EF4-FFF2-40B4-BE49-F238E27FC236}">
+                <a16:creationId xmlns:a16="http://schemas.microsoft.com/office/drawing/2014/main" id="{FB297654-1D26-D73B-873B-CA6E27FDE6B7}"/>
+              </a:ext>
+            </a:extLst>
+          </p:cNvPr>
+          <p:cNvSpPr/>
+          <p:nvPr/>
+        </p:nvSpPr>
+        <p:spPr>
+          <a:xfrm>
+            <a:off x="90702" y="1738544"/>
+            <a:ext cx="3835685" cy="646331"/>
+          </a:xfrm>
+          <a:prstGeom prst="rect">
+            <a:avLst/>
+          </a:prstGeom>
+        </p:spPr>
+        <p:txBody>
+          <a:bodyPr wrap="square">
+            <a:spAutoFit/>
+          </a:bodyPr>
+          <a:lstStyle/>
+          <a:p>
+            <a:r>
+              <a:rPr lang="en-US" b="1"/>
+              <a:t>super() is inserted automatically (only for no-arg)</a:t>
+            </a:r>
+            <a:endParaRPr lang="en-US" dirty="0"/>
+          </a:p>
+        </p:txBody>
+      </p:sp>
+      <p:pic>
+        <p:nvPicPr>
+          <p:cNvPr id="6" name="Picture 5">
+            <a:extLst>
+              <a:ext uri="{FF2B5EF4-FFF2-40B4-BE49-F238E27FC236}">
+                <a16:creationId xmlns:a16="http://schemas.microsoft.com/office/drawing/2014/main" id="{A7AA141F-9F57-2FA2-1824-BEF5E7A81832}"/>
+              </a:ext>
+            </a:extLst>
+          </p:cNvPr>
+          <p:cNvPicPr>
+            <a:picLocks noChangeAspect="1"/>
+          </p:cNvPicPr>
+          <p:nvPr/>
+        </p:nvPicPr>
+        <p:blipFill>
+          <a:blip r:embed="rId2"/>
+          <a:stretch>
+            <a:fillRect/>
+          </a:stretch>
+        </p:blipFill>
+        <p:spPr>
+          <a:xfrm>
+            <a:off x="4225545" y="0"/>
+            <a:ext cx="7966455" cy="6858000"/>
+          </a:xfrm>
+          <a:prstGeom prst="rect">
+            <a:avLst/>
+          </a:prstGeom>
+        </p:spPr>
+      </p:pic>
+      <p:pic>
+        <p:nvPicPr>
+          <p:cNvPr id="8" name="Picture 7">
+            <a:extLst>
+              <a:ext uri="{FF2B5EF4-FFF2-40B4-BE49-F238E27FC236}">
+                <a16:creationId xmlns:a16="http://schemas.microsoft.com/office/drawing/2014/main" id="{3B37170C-D4BD-9DFF-6BB3-35671F5CFA33}"/>
+              </a:ext>
+            </a:extLst>
+          </p:cNvPr>
+          <p:cNvPicPr>
+            <a:picLocks noChangeAspect="1"/>
+          </p:cNvPicPr>
+          <p:nvPr/>
+        </p:nvPicPr>
+        <p:blipFill>
+          <a:blip r:embed="rId3"/>
+          <a:stretch>
+            <a:fillRect/>
+          </a:stretch>
+        </p:blipFill>
+        <p:spPr>
+          <a:xfrm>
+            <a:off x="486615" y="4920334"/>
+            <a:ext cx="2505075" cy="1019175"/>
+          </a:xfrm>
+          <a:prstGeom prst="rect">
+            <a:avLst/>
+          </a:prstGeom>
+        </p:spPr>
+      </p:pic>
+    </p:spTree>
+    <p:extLst>
+      <p:ext uri="{BB962C8B-B14F-4D97-AF65-F5344CB8AC3E}">
+        <p14:creationId xmlns:p14="http://schemas.microsoft.com/office/powerpoint/2010/main" val="2494931549"/>
+      </p:ext>
+    </p:extLst>
+  </p:cSld>
+  <p:clrMapOvr>
+    <a:masterClrMapping/>
+  </p:clrMapOvr>
+</p:sld>
+</file>
+
 <file path=ppt/slides/slide2.xml><?xml version="1.0" encoding="utf-8"?>
 <p:sld xmlns:a="http://schemas.openxmlformats.org/drawingml/2006/main" xmlns:r="http://schemas.openxmlformats.org/officeDocument/2006/relationships" xmlns:p="http://schemas.openxmlformats.org/presentationml/2006/main">
   <p:cSld>
@@ -6738,7 +7002,7 @@
         <p:spPr>
           <a:xfrm>
             <a:off x="90702" y="1738544"/>
-            <a:ext cx="3835685" cy="646331"/>
+            <a:ext cx="3835685" cy="369332"/>
           </a:xfrm>
           <a:prstGeom prst="rect">
             <a:avLst/>
@@ -6752,7 +7016,7 @@
           <a:p>
             <a:r>
               <a:rPr lang="en-US" b="1" dirty="0"/>
-              <a:t>Calling Overloaded Parent Constructors</a:t>
+              <a:t>Constructor Chaining</a:t>
             </a:r>
             <a:endParaRPr lang="en-US" dirty="0"/>
           </a:p>
@@ -6760,10 +7024,10 @@
       </p:sp>
       <p:pic>
         <p:nvPicPr>
-          <p:cNvPr id="4" name="Picture 3">
+          <p:cNvPr id="5" name="Picture 4">
             <a:extLst>
               <a:ext uri="{FF2B5EF4-FFF2-40B4-BE49-F238E27FC236}">
-                <a16:creationId xmlns:a16="http://schemas.microsoft.com/office/drawing/2014/main" id="{074F1446-BACC-6854-FC31-46953563552C}"/>
+                <a16:creationId xmlns:a16="http://schemas.microsoft.com/office/drawing/2014/main" id="{900877E3-1C6D-B207-09A1-0C0000D60FAA}"/>
               </a:ext>
             </a:extLst>
           </p:cNvPr>
@@ -6780,44 +7044,124 @@
         </p:blipFill>
         <p:spPr>
           <a:xfrm>
-            <a:off x="4859964" y="0"/>
-            <a:ext cx="7463619" cy="6858000"/>
+            <a:off x="4082905" y="0"/>
+            <a:ext cx="8201025" cy="6591300"/>
           </a:xfrm>
           <a:prstGeom prst="rect">
             <a:avLst/>
           </a:prstGeom>
         </p:spPr>
       </p:pic>
-      <p:pic>
-        <p:nvPicPr>
-          <p:cNvPr id="8" name="Picture 7">
+      <p:sp>
+        <p:nvSpPr>
+          <p:cNvPr id="7" name="TextBox 6">
             <a:extLst>
               <a:ext uri="{FF2B5EF4-FFF2-40B4-BE49-F238E27FC236}">
-                <a16:creationId xmlns:a16="http://schemas.microsoft.com/office/drawing/2014/main" id="{D7072D66-5FFC-2756-F9F6-1C2D76716007}"/>
+                <a16:creationId xmlns:a16="http://schemas.microsoft.com/office/drawing/2014/main" id="{CD070804-57CE-019C-A549-0BDAA2998442}"/>
               </a:ext>
             </a:extLst>
           </p:cNvPr>
-          <p:cNvPicPr>
-            <a:picLocks noChangeAspect="1"/>
-          </p:cNvPicPr>
+          <p:cNvSpPr txBox="1"/>
           <p:nvPr/>
-        </p:nvPicPr>
-        <p:blipFill>
-          <a:blip r:embed="rId3"/>
-          <a:stretch>
-            <a:fillRect/>
-          </a:stretch>
-        </p:blipFill>
-        <p:spPr>
-          <a:xfrm>
-            <a:off x="716953" y="5180816"/>
-            <a:ext cx="2324100" cy="971550"/>
+        </p:nvSpPr>
+        <p:spPr>
+          <a:xfrm>
+            <a:off x="90702" y="2231162"/>
+            <a:ext cx="3403383" cy="1754326"/>
           </a:xfrm>
           <a:prstGeom prst="rect">
             <a:avLst/>
           </a:prstGeom>
-        </p:spPr>
-      </p:pic>
+          <a:noFill/>
+        </p:spPr>
+        <p:txBody>
+          <a:bodyPr wrap="square">
+            <a:spAutoFit/>
+          </a:bodyPr>
+          <a:lstStyle/>
+          <a:p>
+            <a:pPr>
+              <a:buNone/>
+            </a:pPr>
+            <a:r>
+              <a:rPr lang="en-US" dirty="0">
+                <a:effectLst/>
+              </a:rPr>
+              <a:t>When constructors call other constructors (in the same class or in the parent class) to avoid code duplication and ensure proper initialization.</a:t>
+            </a:r>
+          </a:p>
+        </p:txBody>
+      </p:sp>
+      <p:sp>
+        <p:nvSpPr>
+          <p:cNvPr id="10" name="TextBox 9">
+            <a:extLst>
+              <a:ext uri="{FF2B5EF4-FFF2-40B4-BE49-F238E27FC236}">
+                <a16:creationId xmlns:a16="http://schemas.microsoft.com/office/drawing/2014/main" id="{D8A1CDDB-35B3-6022-75B3-E507A8B9C96E}"/>
+              </a:ext>
+            </a:extLst>
+          </p:cNvPr>
+          <p:cNvSpPr txBox="1"/>
+          <p:nvPr/>
+        </p:nvSpPr>
+        <p:spPr>
+          <a:xfrm>
+            <a:off x="90702" y="4108774"/>
+            <a:ext cx="3442785" cy="1754326"/>
+          </a:xfrm>
+          <a:prstGeom prst="rect">
+            <a:avLst/>
+          </a:prstGeom>
+          <a:noFill/>
+        </p:spPr>
+        <p:txBody>
+          <a:bodyPr wrap="square">
+            <a:spAutoFit/>
+          </a:bodyPr>
+          <a:lstStyle/>
+          <a:p>
+            <a:pPr>
+              <a:buNone/>
+            </a:pPr>
+            <a:r>
+              <a:rPr lang="en-US" dirty="0">
+                <a:effectLst/>
+              </a:rPr>
+              <a:t>Two ways:</a:t>
+            </a:r>
+          </a:p>
+          <a:p>
+            <a:pPr>
+              <a:buFont typeface="+mj-lt"/>
+              <a:buAutoNum type="arabicPeriod"/>
+            </a:pPr>
+            <a:r>
+              <a:rPr lang="en-US" dirty="0"/>
+              <a:t> this(...) → calls another constructor </a:t>
+            </a:r>
+            <a:r>
+              <a:rPr lang="en-US" b="1" dirty="0"/>
+              <a:t>in the same class</a:t>
+            </a:r>
+            <a:endParaRPr lang="en-US" dirty="0"/>
+          </a:p>
+          <a:p>
+            <a:pPr>
+              <a:buFont typeface="+mj-lt"/>
+              <a:buAutoNum type="arabicPeriod"/>
+            </a:pPr>
+            <a:r>
+              <a:rPr lang="en-US" dirty="0"/>
+              <a:t> super(...) → calls a constructor </a:t>
+            </a:r>
+            <a:r>
+              <a:rPr lang="en-US" b="1" dirty="0"/>
+              <a:t>in the immediate parent class</a:t>
+            </a:r>
+            <a:endParaRPr lang="en-US" dirty="0"/>
+          </a:p>
+        </p:txBody>
+      </p:sp>
     </p:spTree>
     <p:extLst>
       <p:ext uri="{BB962C8B-B14F-4D97-AF65-F5344CB8AC3E}">
@@ -6839,7 +7183,7 @@
         <p:cNvPr id="1" name="">
           <a:extLst>
             <a:ext uri="{FF2B5EF4-FFF2-40B4-BE49-F238E27FC236}">
-              <a16:creationId xmlns:a16="http://schemas.microsoft.com/office/drawing/2014/main" id="{A61F71DB-D447-FC3E-2ED5-F5B1101F583B}"/>
+              <a16:creationId xmlns:a16="http://schemas.microsoft.com/office/drawing/2014/main" id="{EBC24D33-6855-C85B-692F-B31833822202}"/>
             </a:ext>
           </a:extLst>
         </p:cNvPr>
@@ -6859,7 +7203,7 @@
           <p:cNvPr id="3" name="Rectangle 2">
             <a:extLst>
               <a:ext uri="{FF2B5EF4-FFF2-40B4-BE49-F238E27FC236}">
-                <a16:creationId xmlns:a16="http://schemas.microsoft.com/office/drawing/2014/main" id="{60A03966-8B46-DC28-3010-08BDEB20478D}"/>
+                <a16:creationId xmlns:a16="http://schemas.microsoft.com/office/drawing/2014/main" id="{196124BA-F327-5F3A-6992-753C84255EE4}"/>
               </a:ext>
             </a:extLst>
           </p:cNvPr>
@@ -6868,8 +7212,8 @@
         </p:nvSpPr>
         <p:spPr>
           <a:xfrm>
-            <a:off x="90702" y="1738544"/>
-            <a:ext cx="3835685" cy="646331"/>
+            <a:off x="90702" y="1424507"/>
+            <a:ext cx="3835685" cy="369332"/>
           </a:xfrm>
           <a:prstGeom prst="rect">
             <a:avLst/>
@@ -6882,8 +7226,8 @@
           <a:lstStyle/>
           <a:p>
             <a:r>
-              <a:rPr lang="en-US" b="1"/>
-              <a:t>super() is inserted automatically (only for no-arg)</a:t>
+              <a:rPr lang="en-US" b="1" dirty="0"/>
+              <a:t>Constructor Chaining</a:t>
             </a:r>
             <a:endParaRPr lang="en-US" dirty="0"/>
           </a:p>
@@ -6891,10 +7235,10 @@
       </p:sp>
       <p:pic>
         <p:nvPicPr>
-          <p:cNvPr id="10" name="Picture 9">
+          <p:cNvPr id="4" name="Picture 3">
             <a:extLst>
               <a:ext uri="{FF2B5EF4-FFF2-40B4-BE49-F238E27FC236}">
-                <a16:creationId xmlns:a16="http://schemas.microsoft.com/office/drawing/2014/main" id="{CD50B38E-D7EF-18A6-0E63-0C092BE68AFD}"/>
+                <a16:creationId xmlns:a16="http://schemas.microsoft.com/office/drawing/2014/main" id="{838B2E61-EAA2-9CBB-75A7-AACBD6520391}"/>
               </a:ext>
             </a:extLst>
           </p:cNvPr>
@@ -6911,20 +7255,106 @@
         </p:blipFill>
         <p:spPr>
           <a:xfrm>
-            <a:off x="4146052" y="0"/>
-            <a:ext cx="8239125" cy="5562600"/>
+            <a:off x="4065090" y="347662"/>
+            <a:ext cx="8401050" cy="6162675"/>
           </a:xfrm>
           <a:prstGeom prst="rect">
             <a:avLst/>
           </a:prstGeom>
         </p:spPr>
       </p:pic>
+      <p:sp>
+        <p:nvSpPr>
+          <p:cNvPr id="10" name="TextBox 9">
+            <a:extLst>
+              <a:ext uri="{FF2B5EF4-FFF2-40B4-BE49-F238E27FC236}">
+                <a16:creationId xmlns:a16="http://schemas.microsoft.com/office/drawing/2014/main" id="{8328E6F4-47D7-EA58-27BC-28E9A7EC80B0}"/>
+              </a:ext>
+            </a:extLst>
+          </p:cNvPr>
+          <p:cNvSpPr txBox="1"/>
+          <p:nvPr/>
+        </p:nvSpPr>
+        <p:spPr>
+          <a:xfrm>
+            <a:off x="90702" y="1793839"/>
+            <a:ext cx="3770098" cy="3139321"/>
+          </a:xfrm>
+          <a:prstGeom prst="rect">
+            <a:avLst/>
+          </a:prstGeom>
+          <a:noFill/>
+        </p:spPr>
+        <p:txBody>
+          <a:bodyPr wrap="square" rtlCol="0">
+            <a:spAutoFit/>
+          </a:bodyPr>
+          <a:lstStyle/>
+          <a:p>
+            <a:r>
+              <a:rPr lang="en-US" b="1" dirty="0"/>
+              <a:t>Rules:</a:t>
+            </a:r>
+          </a:p>
+          <a:p>
+            <a:endParaRPr lang="en-US" b="1" dirty="0"/>
+          </a:p>
+          <a:p>
+            <a:r>
+              <a:rPr lang="en-US" dirty="0"/>
+              <a:t>this(...) or super(...) must be the </a:t>
+            </a:r>
+            <a:r>
+              <a:rPr lang="en-US" b="1" dirty="0"/>
+              <a:t>first statement</a:t>
+            </a:r>
+            <a:r>
+              <a:rPr lang="en-US" dirty="0"/>
+              <a:t> in a constructor.</a:t>
+            </a:r>
+          </a:p>
+          <a:p>
+            <a:endParaRPr lang="en-US" dirty="0"/>
+          </a:p>
+          <a:p>
+            <a:r>
+              <a:rPr lang="en-US" dirty="0"/>
+              <a:t>Only </a:t>
+            </a:r>
+            <a:r>
+              <a:rPr lang="en-US" b="1" dirty="0"/>
+              <a:t>one</a:t>
+            </a:r>
+            <a:r>
+              <a:rPr lang="en-US" dirty="0"/>
+              <a:t> of them can be used (not both).</a:t>
+            </a:r>
+          </a:p>
+          <a:p>
+            <a:endParaRPr lang="en-US" dirty="0"/>
+          </a:p>
+          <a:p>
+            <a:r>
+              <a:rPr lang="en-US" dirty="0"/>
+              <a:t>If you write nothing → compiler automatically inserts super() (no-</a:t>
+            </a:r>
+            <a:r>
+              <a:rPr lang="en-US" dirty="0" err="1"/>
+              <a:t>arg</a:t>
+            </a:r>
+            <a:r>
+              <a:rPr lang="en-US" dirty="0"/>
+              <a:t> parent constructor).</a:t>
+            </a:r>
+          </a:p>
+        </p:txBody>
+      </p:sp>
       <p:pic>
         <p:nvPicPr>
-          <p:cNvPr id="12" name="Picture 11">
+          <p:cNvPr id="16" name="Picture 15">
             <a:extLst>
               <a:ext uri="{FF2B5EF4-FFF2-40B4-BE49-F238E27FC236}">
-                <a16:creationId xmlns:a16="http://schemas.microsoft.com/office/drawing/2014/main" id="{F365109C-0E95-A214-036F-1D2D30B2C06A}"/>
+                <a16:creationId xmlns:a16="http://schemas.microsoft.com/office/drawing/2014/main" id="{E898CD8D-5B03-B6D6-76A2-F016DC1D8522}"/>
               </a:ext>
             </a:extLst>
           </p:cNvPr>
@@ -6941,8 +7371,8 @@
         </p:blipFill>
         <p:spPr>
           <a:xfrm>
-            <a:off x="4146052" y="5562600"/>
-            <a:ext cx="4010025" cy="1000125"/>
+            <a:off x="0" y="5038725"/>
+            <a:ext cx="4065090" cy="1819275"/>
           </a:xfrm>
           <a:prstGeom prst="rect">
             <a:avLst/>
@@ -6952,7 +7382,7 @@
     </p:spTree>
     <p:extLst>
       <p:ext uri="{BB962C8B-B14F-4D97-AF65-F5344CB8AC3E}">
-        <p14:creationId xmlns:p14="http://schemas.microsoft.com/office/powerpoint/2010/main" val="804929803"/>
+        <p14:creationId xmlns:p14="http://schemas.microsoft.com/office/powerpoint/2010/main" val="209295032"/>
       </p:ext>
     </p:extLst>
   </p:cSld>
@@ -6970,7 +7400,7 @@
         <p:cNvPr id="1" name="">
           <a:extLst>
             <a:ext uri="{FF2B5EF4-FFF2-40B4-BE49-F238E27FC236}">
-              <a16:creationId xmlns:a16="http://schemas.microsoft.com/office/drawing/2014/main" id="{417FCE13-2723-0DB1-3D66-F58BBC2E0292}"/>
+              <a16:creationId xmlns:a16="http://schemas.microsoft.com/office/drawing/2014/main" id="{C4070B9B-1BAF-716C-C889-9BE527008FB3}"/>
             </a:ext>
           </a:extLst>
         </p:cNvPr>
@@ -6990,7 +7420,7 @@
           <p:cNvPr id="3" name="Rectangle 2">
             <a:extLst>
               <a:ext uri="{FF2B5EF4-FFF2-40B4-BE49-F238E27FC236}">
-                <a16:creationId xmlns:a16="http://schemas.microsoft.com/office/drawing/2014/main" id="{FB297654-1D26-D73B-873B-CA6E27FDE6B7}"/>
+                <a16:creationId xmlns:a16="http://schemas.microsoft.com/office/drawing/2014/main" id="{F857BAB5-99F7-BF78-62A3-ADA033C3BBEC}"/>
               </a:ext>
             </a:extLst>
           </p:cNvPr>
@@ -7013,8 +7443,8 @@
           <a:lstStyle/>
           <a:p>
             <a:r>
-              <a:rPr lang="en-US" b="1"/>
-              <a:t>super() is inserted automatically (only for no-arg)</a:t>
+              <a:rPr lang="en-US" b="1" dirty="0"/>
+              <a:t>Calling Overloaded Parent Constructors</a:t>
             </a:r>
             <a:endParaRPr lang="en-US" dirty="0"/>
           </a:p>
@@ -7022,10 +7452,10 @@
       </p:sp>
       <p:pic>
         <p:nvPicPr>
-          <p:cNvPr id="6" name="Picture 5">
+          <p:cNvPr id="4" name="Picture 3">
             <a:extLst>
               <a:ext uri="{FF2B5EF4-FFF2-40B4-BE49-F238E27FC236}">
-                <a16:creationId xmlns:a16="http://schemas.microsoft.com/office/drawing/2014/main" id="{A7AA141F-9F57-2FA2-1824-BEF5E7A81832}"/>
+                <a16:creationId xmlns:a16="http://schemas.microsoft.com/office/drawing/2014/main" id="{9D243D50-ED68-91E9-F772-6CE55C032CAA}"/>
               </a:ext>
             </a:extLst>
           </p:cNvPr>
@@ -7042,8 +7472,8 @@
         </p:blipFill>
         <p:spPr>
           <a:xfrm>
-            <a:off x="4225545" y="0"/>
-            <a:ext cx="7966455" cy="6858000"/>
+            <a:off x="4859964" y="0"/>
+            <a:ext cx="7463619" cy="6858000"/>
           </a:xfrm>
           <a:prstGeom prst="rect">
             <a:avLst/>
@@ -7055,7 +7485,7 @@
           <p:cNvPr id="8" name="Picture 7">
             <a:extLst>
               <a:ext uri="{FF2B5EF4-FFF2-40B4-BE49-F238E27FC236}">
-                <a16:creationId xmlns:a16="http://schemas.microsoft.com/office/drawing/2014/main" id="{3B37170C-D4BD-9DFF-6BB3-35671F5CFA33}"/>
+                <a16:creationId xmlns:a16="http://schemas.microsoft.com/office/drawing/2014/main" id="{570A447E-A850-AE73-8972-2DA39FF86112}"/>
               </a:ext>
             </a:extLst>
           </p:cNvPr>
@@ -7072,8 +7502,8 @@
         </p:blipFill>
         <p:spPr>
           <a:xfrm>
-            <a:off x="486615" y="4920334"/>
-            <a:ext cx="2505075" cy="1019175"/>
+            <a:off x="716953" y="5180816"/>
+            <a:ext cx="2324100" cy="971550"/>
           </a:xfrm>
           <a:prstGeom prst="rect">
             <a:avLst/>
@@ -7083,7 +7513,7 @@
     </p:spTree>
     <p:extLst>
       <p:ext uri="{BB962C8B-B14F-4D97-AF65-F5344CB8AC3E}">
-        <p14:creationId xmlns:p14="http://schemas.microsoft.com/office/powerpoint/2010/main" val="2494931549"/>
+        <p14:creationId xmlns:p14="http://schemas.microsoft.com/office/powerpoint/2010/main" val="2846351032"/>
       </p:ext>
     </p:extLst>
   </p:cSld>

--- a/CSE281/Lecture 7.pptx
+++ b/CSE281/Lecture 7.pptx
@@ -292,7 +292,7 @@
           <a:p>
             <a:fld id="{48A87A34-81AB-432B-8DAE-1953F412C126}" type="datetimeFigureOut">
               <a:rPr lang="en-US" dirty="0"/>
-              <a:t>11/19/2025</a:t>
+              <a:t>11/23/2025</a:t>
             </a:fld>
             <a:endParaRPr lang="en-US" dirty="0"/>
           </a:p>
@@ -554,7 +554,7 @@
           <a:p>
             <a:fld id="{48A87A34-81AB-432B-8DAE-1953F412C126}" type="datetimeFigureOut">
               <a:rPr lang="en-US" dirty="0"/>
-              <a:t>11/19/2025</a:t>
+              <a:t>11/23/2025</a:t>
             </a:fld>
             <a:endParaRPr lang="en-US" dirty="0"/>
           </a:p>
@@ -781,7 +781,7 @@
             <a:fld id="{48A87A34-81AB-432B-8DAE-1953F412C126}" type="datetimeFigureOut">
               <a:rPr lang="en-US" dirty="0"/>
               <a:pPr/>
-              <a:t>11/19/2025</a:t>
+              <a:t>11/23/2025</a:t>
             </a:fld>
             <a:endParaRPr lang="en-US" dirty="0"/>
           </a:p>
@@ -1087,7 +1087,7 @@
             <a:fld id="{48A87A34-81AB-432B-8DAE-1953F412C126}" type="datetimeFigureOut">
               <a:rPr lang="en-US" dirty="0"/>
               <a:pPr/>
-              <a:t>11/19/2025</a:t>
+              <a:t>11/23/2025</a:t>
             </a:fld>
             <a:endParaRPr lang="en-US" dirty="0"/>
           </a:p>
@@ -1556,7 +1556,7 @@
             <a:fld id="{48A87A34-81AB-432B-8DAE-1953F412C126}" type="datetimeFigureOut">
               <a:rPr lang="en-US" dirty="0"/>
               <a:pPr/>
-              <a:t>11/19/2025</a:t>
+              <a:t>11/23/2025</a:t>
             </a:fld>
             <a:endParaRPr lang="en-US" dirty="0"/>
           </a:p>
@@ -2098,7 +2098,7 @@
           <a:p>
             <a:fld id="{48A87A34-81AB-432B-8DAE-1953F412C126}" type="datetimeFigureOut">
               <a:rPr lang="en-US" dirty="0"/>
-              <a:t>11/19/2025</a:t>
+              <a:t>11/23/2025</a:t>
             </a:fld>
             <a:endParaRPr lang="en-US" dirty="0"/>
           </a:p>
@@ -2867,7 +2867,7 @@
           <a:p>
             <a:fld id="{48A87A34-81AB-432B-8DAE-1953F412C126}" type="datetimeFigureOut">
               <a:rPr lang="en-US" dirty="0"/>
-              <a:t>11/19/2025</a:t>
+              <a:t>11/23/2025</a:t>
             </a:fld>
             <a:endParaRPr lang="en-US" dirty="0"/>
           </a:p>
@@ -3037,7 +3037,7 @@
           <a:p>
             <a:fld id="{48A87A34-81AB-432B-8DAE-1953F412C126}" type="datetimeFigureOut">
               <a:rPr lang="en-US" dirty="0"/>
-              <a:t>11/19/2025</a:t>
+              <a:t>11/23/2025</a:t>
             </a:fld>
             <a:endParaRPr lang="en-US" dirty="0"/>
           </a:p>
@@ -3256,7 +3256,7 @@
             <a:fld id="{48A87A34-81AB-432B-8DAE-1953F412C126}" type="datetimeFigureOut">
               <a:rPr lang="en-US" dirty="0"/>
               <a:pPr/>
-              <a:t>11/19/2025</a:t>
+              <a:t>11/23/2025</a:t>
             </a:fld>
             <a:endParaRPr lang="en-US" dirty="0"/>
           </a:p>
@@ -3431,7 +3431,7 @@
           <a:p>
             <a:fld id="{48A87A34-81AB-432B-8DAE-1953F412C126}" type="datetimeFigureOut">
               <a:rPr lang="en-US" dirty="0"/>
-              <a:t>11/19/2025</a:t>
+              <a:t>11/23/2025</a:t>
             </a:fld>
             <a:endParaRPr lang="en-US" dirty="0"/>
           </a:p>
@@ -3716,7 +3716,7 @@
             <a:fld id="{48A87A34-81AB-432B-8DAE-1953F412C126}" type="datetimeFigureOut">
               <a:rPr lang="en-US" dirty="0"/>
               <a:pPr/>
-              <a:t>11/19/2025</a:t>
+              <a:t>11/23/2025</a:t>
             </a:fld>
             <a:endParaRPr lang="en-US" dirty="0"/>
           </a:p>
@@ -3953,7 +3953,7 @@
           <a:p>
             <a:fld id="{48A87A34-81AB-432B-8DAE-1953F412C126}" type="datetimeFigureOut">
               <a:rPr lang="en-US" dirty="0"/>
-              <a:t>11/19/2025</a:t>
+              <a:t>11/23/2025</a:t>
             </a:fld>
             <a:endParaRPr lang="en-US" dirty="0"/>
           </a:p>
@@ -4327,7 +4327,7 @@
           <a:p>
             <a:fld id="{48A87A34-81AB-432B-8DAE-1953F412C126}" type="datetimeFigureOut">
               <a:rPr lang="en-US" dirty="0"/>
-              <a:t>11/19/2025</a:t>
+              <a:t>11/23/2025</a:t>
             </a:fld>
             <a:endParaRPr lang="en-US" dirty="0"/>
           </a:p>
@@ -4440,7 +4440,7 @@
           <a:p>
             <a:fld id="{48A87A34-81AB-432B-8DAE-1953F412C126}" type="datetimeFigureOut">
               <a:rPr lang="en-US" dirty="0"/>
-              <a:t>11/19/2025</a:t>
+              <a:t>11/23/2025</a:t>
             </a:fld>
             <a:endParaRPr lang="en-US" dirty="0"/>
           </a:p>
@@ -4530,7 +4530,7 @@
           <a:p>
             <a:fld id="{48A87A34-81AB-432B-8DAE-1953F412C126}" type="datetimeFigureOut">
               <a:rPr lang="en-US" dirty="0"/>
-              <a:t>11/19/2025</a:t>
+              <a:t>11/23/2025</a:t>
             </a:fld>
             <a:endParaRPr lang="en-US" dirty="0"/>
           </a:p>
@@ -4774,7 +4774,7 @@
           <a:p>
             <a:fld id="{48A87A34-81AB-432B-8DAE-1953F412C126}" type="datetimeFigureOut">
               <a:rPr lang="en-US" dirty="0"/>
-              <a:t>11/19/2025</a:t>
+              <a:t>11/23/2025</a:t>
             </a:fld>
             <a:endParaRPr lang="en-US" dirty="0"/>
           </a:p>
@@ -5026,7 +5026,7 @@
           <a:p>
             <a:fld id="{48A87A34-81AB-432B-8DAE-1953F412C126}" type="datetimeFigureOut">
               <a:rPr lang="en-US" dirty="0"/>
-              <a:t>11/19/2025</a:t>
+              <a:t>11/23/2025</a:t>
             </a:fld>
             <a:endParaRPr lang="en-US" dirty="0"/>
           </a:p>
@@ -5265,7 +5265,7 @@
             <a:fld id="{48A87A34-81AB-432B-8DAE-1953F412C126}" type="datetimeFigureOut">
               <a:rPr lang="en-US" dirty="0"/>
               <a:pPr/>
-              <a:t>11/19/2025</a:t>
+              <a:t>11/23/2025</a:t>
             </a:fld>
             <a:endParaRPr lang="en-US" dirty="0"/>
           </a:p>
@@ -5939,8 +5939,8 @@
           <a:lstStyle/>
           <a:p>
             <a:r>
-              <a:rPr lang="en-US" b="1"/>
-              <a:t>super() is inserted automatically (only for no-arg)</a:t>
+              <a:rPr lang="en-US" b="1" dirty="0"/>
+              <a:t>super() only calls immediate parent</a:t>
             </a:r>
             <a:endParaRPr lang="en-US" dirty="0"/>
           </a:p>
